--- a/content/W00/D3/slides/C2_W00_D03_half1_STUDENT.pptx
+++ b/content/W00/D3/slides/C2_W00_D03_half1_STUDENT.pptx
@@ -8738,7 +8738,7 @@
                 </a:solidFill>
                 <a:latin typeface="Calibri"/>
               </a:rPr>
-              <a:t>You are the one person in the building who can write Python. The log is the table from Tuesday's SQL paper.</a:t>
+              <a:t>You are the one person in the building who can write Python. The log holds one row per book lent out.</a:t>
             </a:r>
           </a:p>
         </p:txBody>
@@ -12835,7 +12835,7 @@
                 </a:solidFill>
                 <a:latin typeface="Calibri"/>
               </a:rPr>
-              <a:t>A key names a field, and the value sits beside it. One row of Tuesday's table is one dictionary.</a:t>
+              <a:t>A key names a field, and the value sits beside it. One row of the log is one dictionary.</a:t>
             </a:r>
           </a:p>
         </p:txBody>

--- a/content/W00/D3/slides/C2_W00_D03_half1_STUDENT.pptx
+++ b/content/W00/D3/slides/C2_W00_D03_half1_STUDENT.pptx
@@ -3705,14 +3705,14 @@
       </p:sp>
       <p:pic>
         <p:nvPicPr>
-          <p:cNvPr id="6" name="Picture 5" descr="2dca618d529b601e.png"/>
+          <p:cNvPr id="6" name="Picture 5" descr="7f9b88ee653f7cd1.png"/>
           <p:cNvPicPr>
             <a:picLocks noChangeAspect="1"/>
           </p:cNvPicPr>
           <p:nvPr/>
         </p:nvPicPr>
         <p:blipFill>
-          <a:blip r:embed="rId2"/>
+          <a:blip r:embed="rId3"/>
           <a:stretch>
             <a:fillRect/>
           </a:stretch>
@@ -7867,14 +7867,14 @@
       </p:sp>
       <p:pic>
         <p:nvPicPr>
-          <p:cNvPr id="7" name="Picture 6" descr="188ff045cd04c578.png"/>
+          <p:cNvPr id="7" name="Picture 6" descr="131fc8fea8904e6a.png"/>
           <p:cNvPicPr>
             <a:picLocks noChangeAspect="1"/>
           </p:cNvPicPr>
           <p:nvPr/>
         </p:nvPicPr>
         <p:blipFill>
-          <a:blip r:embed="rId2"/>
+          <a:blip r:embed="rId3"/>
           <a:stretch>
             <a:fillRect/>
           </a:stretch>
@@ -9051,14 +9051,14 @@
       </p:sp>
       <p:pic>
         <p:nvPicPr>
-          <p:cNvPr id="6" name="Picture 5" descr="dfb6af358858f232.png"/>
+          <p:cNvPr id="6" name="Picture 5" descr="d94cfe7528ad41c2.png"/>
           <p:cNvPicPr>
             <a:picLocks noChangeAspect="1"/>
           </p:cNvPicPr>
           <p:nvPr/>
         </p:nvPicPr>
         <p:blipFill>
-          <a:blip r:embed="rId2"/>
+          <a:blip r:embed="rId3"/>
           <a:stretch>
             <a:fillRect/>
           </a:stretch>
@@ -9970,14 +9970,14 @@
       </p:sp>
       <p:pic>
         <p:nvPicPr>
-          <p:cNvPr id="6" name="Picture 5" descr="1ffc690f23944cc9.png"/>
+          <p:cNvPr id="6" name="Picture 5" descr="b55d6587d2283d49.png"/>
           <p:cNvPicPr>
             <a:picLocks noChangeAspect="1"/>
           </p:cNvPicPr>
           <p:nvPr/>
         </p:nvPicPr>
         <p:blipFill>
-          <a:blip r:embed="rId2"/>
+          <a:blip r:embed="rId3"/>
           <a:stretch>
             <a:fillRect/>
           </a:stretch>
@@ -12636,14 +12636,14 @@
       </p:sp>
       <p:pic>
         <p:nvPicPr>
-          <p:cNvPr id="6" name="Picture 5" descr="972b17c39f1fba50.png"/>
+          <p:cNvPr id="6" name="Picture 5" descr="2ce2de7501e6a77a.png"/>
           <p:cNvPicPr>
             <a:picLocks noChangeAspect="1"/>
           </p:cNvPicPr>
           <p:nvPr/>
         </p:nvPicPr>
         <p:blipFill>
-          <a:blip r:embed="rId2"/>
+          <a:blip r:embed="rId3"/>
           <a:stretch>
             <a:fillRect/>
           </a:stretch>
